--- a/Extras/Material Compartilhado de PDI/Aula06-Filtros Espaciais II.pptx
+++ b/Extras/Material Compartilhado de PDI/Aula06-Filtros Espaciais II.pptx
@@ -189,6 +189,30 @@
 <file path=ppt/changesInfos/changesInfo1.xml><?xml version="1.0" encoding="utf-8"?>
 <pc:chgInfo xmlns:a="http://schemas.openxmlformats.org/drawingml/2006/main" xmlns:r="http://schemas.openxmlformats.org/officeDocument/2006/relationships" xmlns:ac="http://schemas.microsoft.com/office/drawing/2013/main/command" xmlns:pc="http://schemas.microsoft.com/office/powerpoint/2013/main/command">
   <pc:docChgLst>
+    <pc:chgData name="Bruno Augusto Nassif Travencolo" userId="9765cb90-d5ec-451e-8c7b-af57428794a1" providerId="ADAL" clId="{CF542071-8093-4C6A-9C5D-FEC66CCF9338}"/>
+    <pc:docChg chg="modSld">
+      <pc:chgData name="Bruno Augusto Nassif Travencolo" userId="9765cb90-d5ec-451e-8c7b-af57428794a1" providerId="ADAL" clId="{CF542071-8093-4C6A-9C5D-FEC66CCF9338}" dt="2023-04-20T23:30:00.104" v="3" actId="1076"/>
+      <pc:docMkLst>
+        <pc:docMk/>
+      </pc:docMkLst>
+      <pc:sldChg chg="modSp">
+        <pc:chgData name="Bruno Augusto Nassif Travencolo" userId="9765cb90-d5ec-451e-8c7b-af57428794a1" providerId="ADAL" clId="{CF542071-8093-4C6A-9C5D-FEC66CCF9338}" dt="2023-04-20T23:30:00.104" v="3" actId="1076"/>
+        <pc:sldMkLst>
+          <pc:docMk/>
+          <pc:sldMk cId="3211110765" sldId="329"/>
+        </pc:sldMkLst>
+        <pc:picChg chg="mod">
+          <ac:chgData name="Bruno Augusto Nassif Travencolo" userId="9765cb90-d5ec-451e-8c7b-af57428794a1" providerId="ADAL" clId="{CF542071-8093-4C6A-9C5D-FEC66CCF9338}" dt="2023-04-20T23:30:00.104" v="3" actId="1076"/>
+          <ac:picMkLst>
+            <pc:docMk/>
+            <pc:sldMk cId="3211110765" sldId="329"/>
+            <ac:picMk id="52226" creationId="{00000000-0000-0000-0000-000000000000}"/>
+          </ac:picMkLst>
+        </pc:picChg>
+      </pc:sldChg>
+    </pc:docChg>
+  </pc:docChgLst>
+  <pc:docChgLst>
     <pc:chgData name="Bruno Augusto Nassif Travencolo" userId="9765cb90-d5ec-451e-8c7b-af57428794a1" providerId="ADAL" clId="{AC8ACF3D-1B36-4C37-B5AB-4657A2BCAE18}"/>
     <pc:docChg chg="custSel modSld">
       <pc:chgData name="Bruno Augusto Nassif Travencolo" userId="9765cb90-d5ec-451e-8c7b-af57428794a1" providerId="ADAL" clId="{AC8ACF3D-1B36-4C37-B5AB-4657A2BCAE18}" dt="2023-09-27T20:49:12.544" v="29" actId="20577"/>
@@ -326,30 +350,6 @@
       </pc:sldChg>
     </pc:docChg>
   </pc:docChgLst>
-  <pc:docChgLst>
-    <pc:chgData name="Bruno Augusto Nassif Travencolo" userId="9765cb90-d5ec-451e-8c7b-af57428794a1" providerId="ADAL" clId="{CF542071-8093-4C6A-9C5D-FEC66CCF9338}"/>
-    <pc:docChg chg="modSld">
-      <pc:chgData name="Bruno Augusto Nassif Travencolo" userId="9765cb90-d5ec-451e-8c7b-af57428794a1" providerId="ADAL" clId="{CF542071-8093-4C6A-9C5D-FEC66CCF9338}" dt="2023-04-20T23:30:00.104" v="3" actId="1076"/>
-      <pc:docMkLst>
-        <pc:docMk/>
-      </pc:docMkLst>
-      <pc:sldChg chg="modSp">
-        <pc:chgData name="Bruno Augusto Nassif Travencolo" userId="9765cb90-d5ec-451e-8c7b-af57428794a1" providerId="ADAL" clId="{CF542071-8093-4C6A-9C5D-FEC66CCF9338}" dt="2023-04-20T23:30:00.104" v="3" actId="1076"/>
-        <pc:sldMkLst>
-          <pc:docMk/>
-          <pc:sldMk cId="3211110765" sldId="329"/>
-        </pc:sldMkLst>
-        <pc:picChg chg="mod">
-          <ac:chgData name="Bruno Augusto Nassif Travencolo" userId="9765cb90-d5ec-451e-8c7b-af57428794a1" providerId="ADAL" clId="{CF542071-8093-4C6A-9C5D-FEC66CCF9338}" dt="2023-04-20T23:30:00.104" v="3" actId="1076"/>
-          <ac:picMkLst>
-            <pc:docMk/>
-            <pc:sldMk cId="3211110765" sldId="329"/>
-            <ac:picMk id="52226" creationId="{00000000-0000-0000-0000-000000000000}"/>
-          </ac:picMkLst>
-        </pc:picChg>
-      </pc:sldChg>
-    </pc:docChg>
-  </pc:docChgLst>
 </pc:chgInfo>
 </file>
 
@@ -436,7 +436,7 @@
             <a:fld id="{433F5BE9-BCE9-4E33-A72A-C06C915D5AB1}" type="datetimeFigureOut">
               <a:rPr lang="en-US" smtClean="0"/>
               <a:pPr/>
-              <a:t>9/27/2023</a:t>
+              <a:t>10/21/2026</a:t>
             </a:fld>
             <a:endParaRPr lang="en-US"/>
           </a:p>
@@ -3664,7 +3664,7 @@
             <a:fld id="{D1BCBB75-59B4-45BC-8113-261ADA7DBC16}" type="datetimeFigureOut">
               <a:rPr lang="en-US" smtClean="0"/>
               <a:pPr/>
-              <a:t>9/27/2023</a:t>
+              <a:t>10/21/2026</a:t>
             </a:fld>
             <a:endParaRPr lang="en-US"/>
           </a:p>
@@ -3856,7 +3856,7 @@
             <a:fld id="{D1BCBB75-59B4-45BC-8113-261ADA7DBC16}" type="datetimeFigureOut">
               <a:rPr lang="en-US" smtClean="0"/>
               <a:pPr/>
-              <a:t>9/27/2023</a:t>
+              <a:t>10/21/2026</a:t>
             </a:fld>
             <a:endParaRPr lang="en-US"/>
           </a:p>
@@ -4033,7 +4033,7 @@
             <a:fld id="{D1BCBB75-59B4-45BC-8113-261ADA7DBC16}" type="datetimeFigureOut">
               <a:rPr lang="en-US" smtClean="0"/>
               <a:pPr/>
-              <a:t>9/27/2023</a:t>
+              <a:t>10/21/2026</a:t>
             </a:fld>
             <a:endParaRPr lang="en-US"/>
           </a:p>
@@ -4177,7 +4177,7 @@
             <a:fld id="{D1BCBB75-59B4-45BC-8113-261ADA7DBC16}" type="datetimeFigureOut">
               <a:rPr lang="en-US" smtClean="0"/>
               <a:pPr/>
-              <a:t>9/27/2023</a:t>
+              <a:t>10/21/2026</a:t>
             </a:fld>
             <a:endParaRPr lang="en-US"/>
           </a:p>
@@ -4426,7 +4426,7 @@
             <a:fld id="{D1BCBB75-59B4-45BC-8113-261ADA7DBC16}" type="datetimeFigureOut">
               <a:rPr lang="en-US" smtClean="0"/>
               <a:pPr/>
-              <a:t>9/27/2023</a:t>
+              <a:t>10/21/2026</a:t>
             </a:fld>
             <a:endParaRPr lang="en-US"/>
           </a:p>
@@ -4827,7 +4827,7 @@
             <a:fld id="{D1BCBB75-59B4-45BC-8113-261ADA7DBC16}" type="datetimeFigureOut">
               <a:rPr lang="en-US" smtClean="0"/>
               <a:pPr/>
-              <a:t>9/27/2023</a:t>
+              <a:t>10/21/2026</a:t>
             </a:fld>
             <a:endParaRPr lang="en-US"/>
           </a:p>
@@ -5267,7 +5267,7 @@
             <a:fld id="{D1BCBB75-59B4-45BC-8113-261ADA7DBC16}" type="datetimeFigureOut">
               <a:rPr lang="en-US" smtClean="0"/>
               <a:pPr/>
-              <a:t>9/27/2023</a:t>
+              <a:t>10/21/2026</a:t>
             </a:fld>
             <a:endParaRPr lang="en-US"/>
           </a:p>
@@ -5364,7 +5364,7 @@
             <a:fld id="{D1BCBB75-59B4-45BC-8113-261ADA7DBC16}" type="datetimeFigureOut">
               <a:rPr lang="en-US" smtClean="0"/>
               <a:pPr/>
-              <a:t>9/27/2023</a:t>
+              <a:t>10/21/2026</a:t>
             </a:fld>
             <a:endParaRPr lang="en-US"/>
           </a:p>
@@ -5479,7 +5479,7 @@
             <a:fld id="{D1BCBB75-59B4-45BC-8113-261ADA7DBC16}" type="datetimeFigureOut">
               <a:rPr lang="en-US" smtClean="0"/>
               <a:pPr/>
-              <a:t>9/27/2023</a:t>
+              <a:t>10/21/2026</a:t>
             </a:fld>
             <a:endParaRPr lang="en-US"/>
           </a:p>
@@ -5749,7 +5749,7 @@
             <a:fld id="{D1BCBB75-59B4-45BC-8113-261ADA7DBC16}" type="datetimeFigureOut">
               <a:rPr lang="en-US" smtClean="0"/>
               <a:pPr/>
-              <a:t>9/27/2023</a:t>
+              <a:t>10/21/2026</a:t>
             </a:fld>
             <a:endParaRPr lang="en-US"/>
           </a:p>
@@ -5952,7 +5952,7 @@
             <a:fld id="{D1BCBB75-59B4-45BC-8113-261ADA7DBC16}" type="datetimeFigureOut">
               <a:rPr lang="en-US" smtClean="0"/>
               <a:pPr/>
-              <a:t>9/27/2023</a:t>
+              <a:t>10/21/2026</a:t>
             </a:fld>
             <a:endParaRPr lang="en-US"/>
           </a:p>
@@ -7043,7 +7043,7 @@
             <a:fld id="{D1BCBB75-59B4-45BC-8113-261ADA7DBC16}" type="datetimeFigureOut">
               <a:rPr lang="en-US" smtClean="0"/>
               <a:pPr/>
-              <a:t>9/27/2023</a:t>
+              <a:t>10/21/2026</a:t>
             </a:fld>
             <a:endParaRPr lang="en-US"/>
           </a:p>
@@ -27300,12 +27300,6 @@
 </file>
 
 <file path=customXml/item1.xml><?xml version="1.0" encoding="utf-8"?>
-<p:properties xmlns:p="http://schemas.microsoft.com/office/2006/metadata/properties" xmlns:xsi="http://www.w3.org/2001/XMLSchema-instance" xmlns:pc="http://schemas.microsoft.com/office/infopath/2007/PartnerControls">
-  <documentManagement/>
-</p:properties>
-</file>
-
-<file path=customXml/item2.xml><?xml version="1.0" encoding="utf-8"?>
 <ct:contentTypeSchema xmlns:ct="http://schemas.microsoft.com/office/2006/metadata/contentType" xmlns:ma="http://schemas.microsoft.com/office/2006/metadata/properties/metaAttributes" ct:_="" ma:_="" ma:contentTypeName="Documento" ma:contentTypeID="0x01010097B6610C1FC8AB48BA79369D9F0FA2AE" ma:contentTypeVersion="0" ma:contentTypeDescription="Crie um novo documento." ma:contentTypeScope="" ma:versionID="bb0d639e4679164d038a7d1ea4c9b262">
   <xsd:schema xmlns:xsd="http://www.w3.org/2001/XMLSchema" xmlns:xs="http://www.w3.org/2001/XMLSchema" xmlns:p="http://schemas.microsoft.com/office/2006/metadata/properties" targetNamespace="http://schemas.microsoft.com/office/2006/metadata/properties" ma:root="true" ma:fieldsID="397561fba88d9dece65508bac662637b">
     <xsd:element name="properties">
@@ -27419,7 +27413,7 @@
 </ct:contentTypeSchema>
 </file>
 
-<file path=customXml/item3.xml><?xml version="1.0" encoding="utf-8"?>
+<file path=customXml/item2.xml><?xml version="1.0" encoding="utf-8"?>
 <?mso-contentType ?>
 <FormTemplates xmlns="http://schemas.microsoft.com/sharepoint/v3/contenttype/forms">
   <Display>DocumentLibraryForm</Display>
@@ -27428,7 +27422,37 @@
 </FormTemplates>
 </file>
 
+<file path=customXml/item3.xml><?xml version="1.0" encoding="utf-8"?>
+<p:properties xmlns:p="http://schemas.microsoft.com/office/2006/metadata/properties" xmlns:xsi="http://www.w3.org/2001/XMLSchema-instance" xmlns:pc="http://schemas.microsoft.com/office/infopath/2007/PartnerControls">
+  <documentManagement/>
+</p:properties>
+</file>
+
 <file path=customXml/itemProps1.xml><?xml version="1.0" encoding="utf-8"?>
+<ds:datastoreItem xmlns:ds="http://schemas.openxmlformats.org/officeDocument/2006/customXml" ds:itemID="{48F828A5-0245-4338-A889-86CF4A57B3FE}">
+  <ds:schemaRefs>
+    <ds:schemaRef ds:uri="http://schemas.microsoft.com/office/2006/metadata/contentType"/>
+    <ds:schemaRef ds:uri="http://schemas.microsoft.com/office/2006/metadata/properties/metaAttributes"/>
+    <ds:schemaRef ds:uri="http://www.w3.org/2001/XMLSchema"/>
+    <ds:schemaRef ds:uri="http://schemas.microsoft.com/office/2006/metadata/properties"/>
+    <ds:schemaRef ds:uri="http://schemas.openxmlformats.org/package/2006/metadata/core-properties"/>
+    <ds:schemaRef ds:uri="http://purl.org/dc/elements/1.1/"/>
+    <ds:schemaRef ds:uri="http://purl.org/dc/terms/"/>
+    <ds:schemaRef ds:uri="http://schemas.microsoft.com/internal/obd"/>
+    <ds:schemaRef ds:uri="http://schemas.microsoft.com/office/infopath/2007/PartnerControls"/>
+  </ds:schemaRefs>
+</ds:datastoreItem>
+</file>
+
+<file path=customXml/itemProps2.xml><?xml version="1.0" encoding="utf-8"?>
+<ds:datastoreItem xmlns:ds="http://schemas.openxmlformats.org/officeDocument/2006/customXml" ds:itemID="{6C75C035-063F-4B56-B847-58FE9DDC1565}">
+  <ds:schemaRefs>
+    <ds:schemaRef ds:uri="http://schemas.microsoft.com/sharepoint/v3/contenttype/forms"/>
+  </ds:schemaRefs>
+</ds:datastoreItem>
+</file>
+
+<file path=customXml/itemProps3.xml><?xml version="1.0" encoding="utf-8"?>
 <ds:datastoreItem xmlns:ds="http://schemas.openxmlformats.org/officeDocument/2006/customXml" ds:itemID="{746F24BC-69C2-4713-9621-151836595E4E}">
   <ds:schemaRefs>
     <ds:schemaRef ds:uri="http://schemas.microsoft.com/office/2006/documentManagement/types"/>
@@ -27442,16 +27466,4 @@
     <ds:schemaRef ds:uri="http://schemas.microsoft.com/office/infopath/2007/PartnerControls"/>
   </ds:schemaRefs>
 </ds:datastoreItem>
-</file>
-
-<file path=customXml/itemProps2.xml><?xml version="1.0" encoding="utf-8"?>
-<ds:datastoreItem xmlns:ds="http://schemas.openxmlformats.org/officeDocument/2006/customXml" ds:itemID="{48F828A5-0245-4338-A889-86CF4A57B3FE}"/>
-</file>
-
-<file path=customXml/itemProps3.xml><?xml version="1.0" encoding="utf-8"?>
-<ds:datastoreItem xmlns:ds="http://schemas.openxmlformats.org/officeDocument/2006/customXml" ds:itemID="{6C75C035-063F-4B56-B847-58FE9DDC1565}">
-  <ds:schemaRefs>
-    <ds:schemaRef ds:uri="http://schemas.microsoft.com/sharepoint/v3/contenttype/forms"/>
-  </ds:schemaRefs>
-</ds:datastoreItem>
 </file>